--- a/public/fun/pack/pptx/wedding/결혼식_04_오시는길중심_제주유채밭.pptx
+++ b/public/fun/pack/pptx/wedding/결혼식_04_오시는길중심_제주유채밭.pptx
@@ -3347,7 +3347,7 @@
             <a:r>
               <a:rPr sz="3600" b="1" i="0">
                 <a:solidFill>
-                  <a:srgbClr val="605610"/>
+                  <a:srgbClr val="72671D"/>
                 </a:solidFill>
               </a:rPr>
               <a:t>저희 결혼합니다</a:t>
@@ -3385,7 +3385,7 @@
             <a:r>
               <a:rPr sz="1700" b="0" i="1">
                 <a:solidFill>
-                  <a:srgbClr val="605610"/>
+                  <a:srgbClr val="72671D"/>
                 </a:solidFill>
               </a:rPr>
               <a:t>지하철에서 내려 걸어서 오 분입니다</a:t>
@@ -3487,7 +3487,7 @@
             <a:avLst/>
           </a:prstGeom>
           <a:solidFill>
-            <a:srgbClr val="B8A41E"/>
+            <a:srgbClr val="DFC93A"/>
           </a:solidFill>
           <a:ln>
             <a:noFill/>
@@ -3554,11 +3554,11 @@
             <a:avLst/>
           </a:prstGeom>
           <a:solidFill>
-            <a:srgbClr val="F8F2C9"/>
+            <a:srgbClr val="F7F3D4"/>
           </a:solidFill>
           <a:ln w="19050">
             <a:solidFill>
-              <a:srgbClr val="B8A41E"/>
+              <a:srgbClr val="DFC93A"/>
             </a:solidFill>
             <a:prstDash val="dash"/>
           </a:ln>
@@ -3577,7 +3577,7 @@
             <a:r>
               <a:rPr sz="1200" b="0" i="0">
                 <a:solidFill>
-                  <a:srgbClr val="605610"/>
+                  <a:srgbClr val="72671D"/>
                 </a:solidFill>
               </a:rPr>
               <a:t>사진</a:t>
@@ -3615,7 +3615,7 @@
             <a:r>
               <a:rPr sz="1600" b="1" i="0">
                 <a:solidFill>
-                  <a:srgbClr val="605610"/>
+                  <a:srgbClr val="72671D"/>
                 </a:solidFill>
               </a:rPr>
               <a:t>신랑</a:t>
@@ -3706,11 +3706,11 @@
             <a:avLst/>
           </a:prstGeom>
           <a:solidFill>
-            <a:srgbClr val="F8F2C9"/>
+            <a:srgbClr val="F7F3D4"/>
           </a:solidFill>
           <a:ln w="19050">
             <a:solidFill>
-              <a:srgbClr val="B8A41E"/>
+              <a:srgbClr val="DFC93A"/>
             </a:solidFill>
             <a:prstDash val="dash"/>
           </a:ln>
@@ -3729,7 +3729,7 @@
             <a:r>
               <a:rPr sz="1200" b="0" i="0">
                 <a:solidFill>
-                  <a:srgbClr val="605610"/>
+                  <a:srgbClr val="72671D"/>
                 </a:solidFill>
               </a:rPr>
               <a:t>사진</a:t>
@@ -3767,7 +3767,7 @@
             <a:r>
               <a:rPr sz="1600" b="1" i="0">
                 <a:solidFill>
-                  <a:srgbClr val="605610"/>
+                  <a:srgbClr val="72671D"/>
                 </a:solidFill>
               </a:rPr>
               <a:t>신부</a:t>
@@ -3884,7 +3884,7 @@
             <a:avLst/>
           </a:prstGeom>
           <a:solidFill>
-            <a:srgbClr val="B8A41E"/>
+            <a:srgbClr val="DFC93A"/>
           </a:solidFill>
           <a:ln>
             <a:noFill/>
@@ -3953,11 +3953,11 @@
             </a:avLst>
           </a:prstGeom>
           <a:solidFill>
-            <a:srgbClr val="F8F2C9"/>
+            <a:srgbClr val="F7F3D4"/>
           </a:solidFill>
           <a:ln w="19050">
             <a:solidFill>
-              <a:srgbClr val="B8A41E"/>
+              <a:srgbClr val="DFC93A"/>
             </a:solidFill>
             <a:prstDash val="dash"/>
           </a:ln>
@@ -3976,7 +3976,7 @@
             <a:r>
               <a:rPr sz="1400" b="0" i="0">
                 <a:solidFill>
-                  <a:srgbClr val="605610"/>
+                  <a:srgbClr val="72671D"/>
                 </a:solidFill>
               </a:rPr>
               <a:t>약도 · 지도를 넣어 주세요</a:t>
@@ -4016,7 +4016,7 @@
                       <a:r>
                         <a:rPr sz="1400" b="1">
                           <a:solidFill>
-                            <a:srgbClr val="605610"/>
+                            <a:srgbClr val="72671D"/>
                           </a:solidFill>
                         </a:rPr>
                         <a:t>예식장</a:t>
@@ -4026,30 +4026,30 @@
                   <a:tcPr anchor="ctr" marL="73152" marR="73152">
                     <a:lnL w="9525" cap="flat" cmpd="sng" algn="ctr">
                       <a:solidFill>
-                        <a:srgbClr val="F8F2C9"/>
+                        <a:srgbClr val="F7F3D4"/>
                       </a:solidFill>
                       <a:prstDash val="solid"/>
                     </a:lnL>
                     <a:lnR w="9525" cap="flat" cmpd="sng" algn="ctr">
                       <a:solidFill>
-                        <a:srgbClr val="F8F2C9"/>
+                        <a:srgbClr val="F7F3D4"/>
                       </a:solidFill>
                       <a:prstDash val="solid"/>
                     </a:lnR>
                     <a:lnT w="9525" cap="flat" cmpd="sng" algn="ctr">
                       <a:solidFill>
-                        <a:srgbClr val="F8F2C9"/>
+                        <a:srgbClr val="F7F3D4"/>
                       </a:solidFill>
                       <a:prstDash val="solid"/>
                     </a:lnT>
                     <a:lnB w="9525" cap="flat" cmpd="sng" algn="ctr">
                       <a:solidFill>
-                        <a:srgbClr val="F8F2C9"/>
+                        <a:srgbClr val="F7F3D4"/>
                       </a:solidFill>
                       <a:prstDash val="solid"/>
                     </a:lnB>
                     <a:solidFill>
-                      <a:srgbClr val="F8F2C9"/>
+                      <a:srgbClr val="F7F3D4"/>
                     </a:solidFill>
                   </a:tcPr>
                 </a:tc>
@@ -4072,30 +4072,30 @@
                   <a:tcPr anchor="ctr" marL="73152" marR="73152">
                     <a:lnL w="9525" cap="flat" cmpd="sng" algn="ctr">
                       <a:solidFill>
-                        <a:srgbClr val="F8F2C9"/>
+                        <a:srgbClr val="F7F3D4"/>
                       </a:solidFill>
                       <a:prstDash val="solid"/>
                     </a:lnL>
                     <a:lnR w="9525" cap="flat" cmpd="sng" algn="ctr">
                       <a:solidFill>
-                        <a:srgbClr val="F8F2C9"/>
+                        <a:srgbClr val="F7F3D4"/>
                       </a:solidFill>
                       <a:prstDash val="solid"/>
                     </a:lnR>
                     <a:lnT w="9525" cap="flat" cmpd="sng" algn="ctr">
                       <a:solidFill>
-                        <a:srgbClr val="F8F2C9"/>
+                        <a:srgbClr val="F7F3D4"/>
                       </a:solidFill>
                       <a:prstDash val="solid"/>
                     </a:lnT>
                     <a:lnB w="9525" cap="flat" cmpd="sng" algn="ctr">
                       <a:solidFill>
-                        <a:srgbClr val="F8F2C9"/>
+                        <a:srgbClr val="F7F3D4"/>
                       </a:solidFill>
                       <a:prstDash val="solid"/>
                     </a:lnB>
                     <a:solidFill>
-                      <a:srgbClr val="FCFAED"/>
+                      <a:srgbClr val="FCFBF3"/>
                     </a:solidFill>
                   </a:tcPr>
                 </a:tc>
@@ -4110,7 +4110,7 @@
                       <a:r>
                         <a:rPr sz="1400" b="1">
                           <a:solidFill>
-                            <a:srgbClr val="605610"/>
+                            <a:srgbClr val="72671D"/>
                           </a:solidFill>
                         </a:rPr>
                         <a:t>주소</a:t>
@@ -4120,30 +4120,30 @@
                   <a:tcPr anchor="ctr" marL="73152" marR="73152">
                     <a:lnL w="9525" cap="flat" cmpd="sng" algn="ctr">
                       <a:solidFill>
-                        <a:srgbClr val="F8F2C9"/>
+                        <a:srgbClr val="F7F3D4"/>
                       </a:solidFill>
                       <a:prstDash val="solid"/>
                     </a:lnL>
                     <a:lnR w="9525" cap="flat" cmpd="sng" algn="ctr">
                       <a:solidFill>
-                        <a:srgbClr val="F8F2C9"/>
+                        <a:srgbClr val="F7F3D4"/>
                       </a:solidFill>
                       <a:prstDash val="solid"/>
                     </a:lnR>
                     <a:lnT w="9525" cap="flat" cmpd="sng" algn="ctr">
                       <a:solidFill>
-                        <a:srgbClr val="F8F2C9"/>
+                        <a:srgbClr val="F7F3D4"/>
                       </a:solidFill>
                       <a:prstDash val="solid"/>
                     </a:lnT>
                     <a:lnB w="9525" cap="flat" cmpd="sng" algn="ctr">
                       <a:solidFill>
-                        <a:srgbClr val="F8F2C9"/>
+                        <a:srgbClr val="F7F3D4"/>
                       </a:solidFill>
                       <a:prstDash val="solid"/>
                     </a:lnB>
                     <a:solidFill>
-                      <a:srgbClr val="F8F2C9"/>
+                      <a:srgbClr val="F7F3D4"/>
                     </a:solidFill>
                   </a:tcPr>
                 </a:tc>
@@ -4166,25 +4166,25 @@
                   <a:tcPr anchor="ctr" marL="73152" marR="73152">
                     <a:lnL w="9525" cap="flat" cmpd="sng" algn="ctr">
                       <a:solidFill>
-                        <a:srgbClr val="F8F2C9"/>
+                        <a:srgbClr val="F7F3D4"/>
                       </a:solidFill>
                       <a:prstDash val="solid"/>
                     </a:lnL>
                     <a:lnR w="9525" cap="flat" cmpd="sng" algn="ctr">
                       <a:solidFill>
-                        <a:srgbClr val="F8F2C9"/>
+                        <a:srgbClr val="F7F3D4"/>
                       </a:solidFill>
                       <a:prstDash val="solid"/>
                     </a:lnR>
                     <a:lnT w="9525" cap="flat" cmpd="sng" algn="ctr">
                       <a:solidFill>
-                        <a:srgbClr val="F8F2C9"/>
+                        <a:srgbClr val="F7F3D4"/>
                       </a:solidFill>
                       <a:prstDash val="solid"/>
                     </a:lnT>
                     <a:lnB w="9525" cap="flat" cmpd="sng" algn="ctr">
                       <a:solidFill>
-                        <a:srgbClr val="F8F2C9"/>
+                        <a:srgbClr val="F7F3D4"/>
                       </a:solidFill>
                       <a:prstDash val="solid"/>
                     </a:lnB>
@@ -4204,7 +4204,7 @@
                       <a:r>
                         <a:rPr sz="1400" b="1">
                           <a:solidFill>
-                            <a:srgbClr val="605610"/>
+                            <a:srgbClr val="72671D"/>
                           </a:solidFill>
                         </a:rPr>
                         <a:t>일시</a:t>
@@ -4214,30 +4214,30 @@
                   <a:tcPr anchor="ctr" marL="73152" marR="73152">
                     <a:lnL w="9525" cap="flat" cmpd="sng" algn="ctr">
                       <a:solidFill>
-                        <a:srgbClr val="F8F2C9"/>
+                        <a:srgbClr val="F7F3D4"/>
                       </a:solidFill>
                       <a:prstDash val="solid"/>
                     </a:lnL>
                     <a:lnR w="9525" cap="flat" cmpd="sng" algn="ctr">
                       <a:solidFill>
-                        <a:srgbClr val="F8F2C9"/>
+                        <a:srgbClr val="F7F3D4"/>
                       </a:solidFill>
                       <a:prstDash val="solid"/>
                     </a:lnR>
                     <a:lnT w="9525" cap="flat" cmpd="sng" algn="ctr">
                       <a:solidFill>
-                        <a:srgbClr val="F8F2C9"/>
+                        <a:srgbClr val="F7F3D4"/>
                       </a:solidFill>
                       <a:prstDash val="solid"/>
                     </a:lnT>
                     <a:lnB w="9525" cap="flat" cmpd="sng" algn="ctr">
                       <a:solidFill>
-                        <a:srgbClr val="F8F2C9"/>
+                        <a:srgbClr val="F7F3D4"/>
                       </a:solidFill>
                       <a:prstDash val="solid"/>
                     </a:lnB>
                     <a:solidFill>
-                      <a:srgbClr val="F8F2C9"/>
+                      <a:srgbClr val="F7F3D4"/>
                     </a:solidFill>
                   </a:tcPr>
                 </a:tc>
@@ -4260,30 +4260,30 @@
                   <a:tcPr anchor="ctr" marL="73152" marR="73152">
                     <a:lnL w="9525" cap="flat" cmpd="sng" algn="ctr">
                       <a:solidFill>
-                        <a:srgbClr val="F8F2C9"/>
+                        <a:srgbClr val="F7F3D4"/>
                       </a:solidFill>
                       <a:prstDash val="solid"/>
                     </a:lnL>
                     <a:lnR w="9525" cap="flat" cmpd="sng" algn="ctr">
                       <a:solidFill>
-                        <a:srgbClr val="F8F2C9"/>
+                        <a:srgbClr val="F7F3D4"/>
                       </a:solidFill>
                       <a:prstDash val="solid"/>
                     </a:lnR>
                     <a:lnT w="9525" cap="flat" cmpd="sng" algn="ctr">
                       <a:solidFill>
-                        <a:srgbClr val="F8F2C9"/>
+                        <a:srgbClr val="F7F3D4"/>
                       </a:solidFill>
                       <a:prstDash val="solid"/>
                     </a:lnT>
                     <a:lnB w="9525" cap="flat" cmpd="sng" algn="ctr">
                       <a:solidFill>
-                        <a:srgbClr val="F8F2C9"/>
+                        <a:srgbClr val="F7F3D4"/>
                       </a:solidFill>
                       <a:prstDash val="solid"/>
                     </a:lnB>
                     <a:solidFill>
-                      <a:srgbClr val="FCFAED"/>
+                      <a:srgbClr val="FCFBF3"/>
                     </a:solidFill>
                   </a:tcPr>
                 </a:tc>
@@ -4298,7 +4298,7 @@
                       <a:r>
                         <a:rPr sz="1400" b="1">
                           <a:solidFill>
-                            <a:srgbClr val="605610"/>
+                            <a:srgbClr val="72671D"/>
                           </a:solidFill>
                         </a:rPr>
                         <a:t>연락처</a:t>
@@ -4308,30 +4308,30 @@
                   <a:tcPr anchor="ctr" marL="73152" marR="73152">
                     <a:lnL w="9525" cap="flat" cmpd="sng" algn="ctr">
                       <a:solidFill>
-                        <a:srgbClr val="F8F2C9"/>
+                        <a:srgbClr val="F7F3D4"/>
                       </a:solidFill>
                       <a:prstDash val="solid"/>
                     </a:lnL>
                     <a:lnR w="9525" cap="flat" cmpd="sng" algn="ctr">
                       <a:solidFill>
-                        <a:srgbClr val="F8F2C9"/>
+                        <a:srgbClr val="F7F3D4"/>
                       </a:solidFill>
                       <a:prstDash val="solid"/>
                     </a:lnR>
                     <a:lnT w="9525" cap="flat" cmpd="sng" algn="ctr">
                       <a:solidFill>
-                        <a:srgbClr val="F8F2C9"/>
+                        <a:srgbClr val="F7F3D4"/>
                       </a:solidFill>
                       <a:prstDash val="solid"/>
                     </a:lnT>
                     <a:lnB w="9525" cap="flat" cmpd="sng" algn="ctr">
                       <a:solidFill>
-                        <a:srgbClr val="F8F2C9"/>
+                        <a:srgbClr val="F7F3D4"/>
                       </a:solidFill>
                       <a:prstDash val="solid"/>
                     </a:lnB>
                     <a:solidFill>
-                      <a:srgbClr val="F8F2C9"/>
+                      <a:srgbClr val="F7F3D4"/>
                     </a:solidFill>
                   </a:tcPr>
                 </a:tc>
@@ -4354,25 +4354,25 @@
                   <a:tcPr anchor="ctr" marL="73152" marR="73152">
                     <a:lnL w="9525" cap="flat" cmpd="sng" algn="ctr">
                       <a:solidFill>
-                        <a:srgbClr val="F8F2C9"/>
+                        <a:srgbClr val="F7F3D4"/>
                       </a:solidFill>
                       <a:prstDash val="solid"/>
                     </a:lnL>
                     <a:lnR w="9525" cap="flat" cmpd="sng" algn="ctr">
                       <a:solidFill>
-                        <a:srgbClr val="F8F2C9"/>
+                        <a:srgbClr val="F7F3D4"/>
                       </a:solidFill>
                       <a:prstDash val="solid"/>
                     </a:lnR>
                     <a:lnT w="9525" cap="flat" cmpd="sng" algn="ctr">
                       <a:solidFill>
-                        <a:srgbClr val="F8F2C9"/>
+                        <a:srgbClr val="F7F3D4"/>
                       </a:solidFill>
                       <a:prstDash val="solid"/>
                     </a:lnT>
                     <a:lnB w="9525" cap="flat" cmpd="sng" algn="ctr">
                       <a:solidFill>
-                        <a:srgbClr val="F8F2C9"/>
+                        <a:srgbClr val="F7F3D4"/>
                       </a:solidFill>
                       <a:prstDash val="solid"/>
                     </a:lnB>
@@ -4427,7 +4427,7 @@
             <a:avLst/>
           </a:prstGeom>
           <a:solidFill>
-            <a:srgbClr val="B8A41E"/>
+            <a:srgbClr val="DFC93A"/>
           </a:solidFill>
           <a:ln>
             <a:noFill/>
@@ -4496,11 +4496,11 @@
             </a:avLst>
           </a:prstGeom>
           <a:solidFill>
-            <a:srgbClr val="FCFAED"/>
+            <a:srgbClr val="FCFBF3"/>
           </a:solidFill>
           <a:ln w="15875">
             <a:solidFill>
-              <a:srgbClr val="F8F2C9"/>
+              <a:srgbClr val="F7F3D4"/>
             </a:solidFill>
           </a:ln>
         </p:spPr>
@@ -4527,7 +4527,7 @@
             <a:avLst/>
           </a:prstGeom>
           <a:solidFill>
-            <a:srgbClr val="B8A41E"/>
+            <a:srgbClr val="DFC93A"/>
           </a:solidFill>
           <a:ln>
             <a:noFill/>
@@ -4585,7 +4585,7 @@
             <a:r>
               <a:rPr sz="1800" b="1" i="0">
                 <a:solidFill>
-                  <a:srgbClr val="605610"/>
+                  <a:srgbClr val="72671D"/>
                 </a:solidFill>
               </a:rPr>
               <a:t>지하철</a:t>
@@ -4648,11 +4648,11 @@
             </a:avLst>
           </a:prstGeom>
           <a:solidFill>
-            <a:srgbClr val="FCFAED"/>
+            <a:srgbClr val="FCFBF3"/>
           </a:solidFill>
           <a:ln w="15875">
             <a:solidFill>
-              <a:srgbClr val="F8F2C9"/>
+              <a:srgbClr val="F7F3D4"/>
             </a:solidFill>
           </a:ln>
         </p:spPr>
@@ -4679,7 +4679,7 @@
             <a:avLst/>
           </a:prstGeom>
           <a:solidFill>
-            <a:srgbClr val="B8A41E"/>
+            <a:srgbClr val="DFC93A"/>
           </a:solidFill>
           <a:ln>
             <a:noFill/>
@@ -4737,7 +4737,7 @@
             <a:r>
               <a:rPr sz="1800" b="1" i="0">
                 <a:solidFill>
-                  <a:srgbClr val="605610"/>
+                  <a:srgbClr val="72671D"/>
                 </a:solidFill>
               </a:rPr>
               <a:t>버스</a:t>
@@ -4800,11 +4800,11 @@
             </a:avLst>
           </a:prstGeom>
           <a:solidFill>
-            <a:srgbClr val="FCFAED"/>
+            <a:srgbClr val="FCFBF3"/>
           </a:solidFill>
           <a:ln w="15875">
             <a:solidFill>
-              <a:srgbClr val="F8F2C9"/>
+              <a:srgbClr val="F7F3D4"/>
             </a:solidFill>
           </a:ln>
         </p:spPr>
@@ -4831,7 +4831,7 @@
             <a:avLst/>
           </a:prstGeom>
           <a:solidFill>
-            <a:srgbClr val="B8A41E"/>
+            <a:srgbClr val="DFC93A"/>
           </a:solidFill>
           <a:ln>
             <a:noFill/>
@@ -4889,7 +4889,7 @@
             <a:r>
               <a:rPr sz="1800" b="1" i="0">
                 <a:solidFill>
-                  <a:srgbClr val="605610"/>
+                  <a:srgbClr val="72671D"/>
                 </a:solidFill>
               </a:rPr>
               <a:t>자가용 · 주차</a:t>
@@ -4976,7 +4976,7 @@
             <a:avLst/>
           </a:prstGeom>
           <a:solidFill>
-            <a:srgbClr val="B8A41E"/>
+            <a:srgbClr val="DFC93A"/>
           </a:solidFill>
           <a:ln>
             <a:noFill/>
@@ -5045,11 +5045,11 @@
             </a:avLst>
           </a:prstGeom>
           <a:solidFill>
-            <a:srgbClr val="F8F2C9"/>
+            <a:srgbClr val="F7F3D4"/>
           </a:solidFill>
           <a:ln w="19050">
             <a:solidFill>
-              <a:srgbClr val="B8A41E"/>
+              <a:srgbClr val="DFC93A"/>
             </a:solidFill>
             <a:prstDash val="dash"/>
           </a:ln>
@@ -5068,7 +5068,7 @@
             <a:r>
               <a:rPr sz="1200" b="0" i="0">
                 <a:solidFill>
-                  <a:srgbClr val="605610"/>
+                  <a:srgbClr val="72671D"/>
                 </a:solidFill>
               </a:rPr>
               <a:t>사진 1</a:t>
@@ -5093,11 +5093,11 @@
             </a:avLst>
           </a:prstGeom>
           <a:solidFill>
-            <a:srgbClr val="F8F2C9"/>
+            <a:srgbClr val="F7F3D4"/>
           </a:solidFill>
           <a:ln w="19050">
             <a:solidFill>
-              <a:srgbClr val="B8A41E"/>
+              <a:srgbClr val="DFC93A"/>
             </a:solidFill>
             <a:prstDash val="dash"/>
           </a:ln>
@@ -5116,7 +5116,7 @@
             <a:r>
               <a:rPr sz="1200" b="0" i="0">
                 <a:solidFill>
-                  <a:srgbClr val="605610"/>
+                  <a:srgbClr val="72671D"/>
                 </a:solidFill>
               </a:rPr>
               <a:t>사진 2</a:t>
@@ -5141,11 +5141,11 @@
             </a:avLst>
           </a:prstGeom>
           <a:solidFill>
-            <a:srgbClr val="F8F2C9"/>
+            <a:srgbClr val="F7F3D4"/>
           </a:solidFill>
           <a:ln w="19050">
             <a:solidFill>
-              <a:srgbClr val="B8A41E"/>
+              <a:srgbClr val="DFC93A"/>
             </a:solidFill>
             <a:prstDash val="dash"/>
           </a:ln>
@@ -5164,7 +5164,7 @@
             <a:r>
               <a:rPr sz="1200" b="0" i="0">
                 <a:solidFill>
-                  <a:srgbClr val="605610"/>
+                  <a:srgbClr val="72671D"/>
                 </a:solidFill>
               </a:rPr>
               <a:t>사진 3</a:t>
@@ -5189,11 +5189,11 @@
             </a:avLst>
           </a:prstGeom>
           <a:solidFill>
-            <a:srgbClr val="F8F2C9"/>
+            <a:srgbClr val="F7F3D4"/>
           </a:solidFill>
           <a:ln w="19050">
             <a:solidFill>
-              <a:srgbClr val="B8A41E"/>
+              <a:srgbClr val="DFC93A"/>
             </a:solidFill>
             <a:prstDash val="dash"/>
           </a:ln>
@@ -5212,7 +5212,7 @@
             <a:r>
               <a:rPr sz="1200" b="0" i="0">
                 <a:solidFill>
-                  <a:srgbClr val="605610"/>
+                  <a:srgbClr val="72671D"/>
                 </a:solidFill>
               </a:rPr>
               <a:t>사진 4</a:t>
@@ -5237,11 +5237,11 @@
             </a:avLst>
           </a:prstGeom>
           <a:solidFill>
-            <a:srgbClr val="F8F2C9"/>
+            <a:srgbClr val="F7F3D4"/>
           </a:solidFill>
           <a:ln w="19050">
             <a:solidFill>
-              <a:srgbClr val="B8A41E"/>
+              <a:srgbClr val="DFC93A"/>
             </a:solidFill>
             <a:prstDash val="dash"/>
           </a:ln>
@@ -5260,7 +5260,7 @@
             <a:r>
               <a:rPr sz="1200" b="0" i="0">
                 <a:solidFill>
-                  <a:srgbClr val="605610"/>
+                  <a:srgbClr val="72671D"/>
                 </a:solidFill>
               </a:rPr>
               <a:t>사진 5</a:t>
@@ -5285,11 +5285,11 @@
             </a:avLst>
           </a:prstGeom>
           <a:solidFill>
-            <a:srgbClr val="F8F2C9"/>
+            <a:srgbClr val="F7F3D4"/>
           </a:solidFill>
           <a:ln w="19050">
             <a:solidFill>
-              <a:srgbClr val="B8A41E"/>
+              <a:srgbClr val="DFC93A"/>
             </a:solidFill>
             <a:prstDash val="dash"/>
           </a:ln>
@@ -5308,7 +5308,7 @@
             <a:r>
               <a:rPr sz="1200" b="0" i="0">
                 <a:solidFill>
-                  <a:srgbClr val="605610"/>
+                  <a:srgbClr val="72671D"/>
                 </a:solidFill>
               </a:rPr>
               <a:t>사진 6</a:t>
@@ -5388,7 +5388,7 @@
             <a:r>
               <a:rPr sz="3400" b="1" i="0">
                 <a:solidFill>
-                  <a:srgbClr val="605610"/>
+                  <a:srgbClr val="72671D"/>
                 </a:solidFill>
               </a:rPr>
               <a:t>와 주셔서 고맙습니다</a:t>
@@ -5426,7 +5426,7 @@
             <a:r>
               <a:rPr sz="1700" b="0" i="1">
                 <a:solidFill>
-                  <a:srgbClr val="605610"/>
+                  <a:srgbClr val="72671D"/>
                 </a:solidFill>
               </a:rPr>
               <a:t>잘 살겠습니다</a:t>
@@ -5491,34 +5491,34 @@
         <a:sysClr val="window" lastClr="FFFFFF"/>
       </a:lt1>
       <a:dk2>
-        <a:srgbClr val="605610"/>
+        <a:srgbClr val="72671D"/>
       </a:dk2>
       <a:lt2>
-        <a:srgbClr val="FCFAED"/>
+        <a:srgbClr val="FCFBF3"/>
       </a:lt2>
       <a:accent1>
-        <a:srgbClr val="B8A41E"/>
+        <a:srgbClr val="DFC93A"/>
       </a:accent1>
       <a:accent2>
-        <a:srgbClr val="3B7191"/>
+        <a:srgbClr val="339941"/>
       </a:accent2>
       <a:accent3>
-        <a:srgbClr val="605610"/>
+        <a:srgbClr val="72671D"/>
       </a:accent3>
       <a:accent4>
-        <a:srgbClr val="F8F2C9"/>
+        <a:srgbClr val="F7F3D4"/>
       </a:accent4>
       <a:accent5>
-        <a:srgbClr val="7A8A58"/>
+        <a:srgbClr val="89B13E"/>
       </a:accent5>
       <a:accent6>
-        <a:srgbClr val="A09A70"/>
+        <a:srgbClr val="AAA477"/>
       </a:accent6>
       <a:hlink>
-        <a:srgbClr val="B8A41E"/>
+        <a:srgbClr val="DFC93A"/>
       </a:hlink>
       <a:folHlink>
-        <a:srgbClr val="605610"/>
+        <a:srgbClr val="72671D"/>
       </a:folHlink>
     </a:clrScheme>
     <a:fontScheme name="Office">
